--- a/skills/presentation-template-library/skills/artifact-template-gilt-market-ledger/assets/reference.pptx
+++ b/skills/presentation-template-library/skills/artifact-template-gilt-market-ledger/assets/reference.pptx
@@ -4198,7 +4198,7 @@
         </p:xfrm>
         <a:graphic xmlns:a="http://schemas.openxmlformats.org/drawingml/2006/main">
           <a:graphicData uri="http://schemas.openxmlformats.org/drawingml/2006/chart">
-            <c:chart xmlns:r="http://schemas.openxmlformats.org/officeDocument/2006/relationships" xmlns:c="http://schemas.openxmlformats.org/drawingml/2006/chart" r:id="R13aec6abff144a2f"/>
+            <c:chart xmlns:r="http://schemas.openxmlformats.org/officeDocument/2006/relationships" xmlns:c="http://schemas.openxmlformats.org/drawingml/2006/chart" r:id="Rebfbbc01a5234d60"/>
           </a:graphicData>
         </a:graphic>
       </p:graphicFrame>
@@ -4216,7 +4216,7 @@
         </p:xfrm>
         <a:graphic xmlns:a="http://schemas.openxmlformats.org/drawingml/2006/main">
           <a:graphicData uri="http://schemas.openxmlformats.org/drawingml/2006/chart">
-            <c:chart xmlns:r="http://schemas.openxmlformats.org/officeDocument/2006/relationships" xmlns:c="http://schemas.openxmlformats.org/drawingml/2006/chart" r:id="R165151af8f2a4a1b"/>
+            <c:chart xmlns:r="http://schemas.openxmlformats.org/officeDocument/2006/relationships" xmlns:c="http://schemas.openxmlformats.org/drawingml/2006/chart" r:id="Rdaf1181cd1454c80"/>
           </a:graphicData>
         </a:graphic>
       </p:graphicFrame>

--- a/skills/presentation-template-library/skills/artifact-template-gilt-market-ledger/assets/reference.pptx
+++ b/skills/presentation-template-library/skills/artifact-template-gilt-market-ledger/assets/reference.pptx
@@ -4198,7 +4198,7 @@
         </p:xfrm>
         <a:graphic xmlns:a="http://schemas.openxmlformats.org/drawingml/2006/main">
           <a:graphicData uri="http://schemas.openxmlformats.org/drawingml/2006/chart">
-            <c:chart xmlns:r="http://schemas.openxmlformats.org/officeDocument/2006/relationships" xmlns:c="http://schemas.openxmlformats.org/drawingml/2006/chart" r:id="Rebfbbc01a5234d60"/>
+            <c:chart xmlns:r="http://schemas.openxmlformats.org/officeDocument/2006/relationships" xmlns:c="http://schemas.openxmlformats.org/drawingml/2006/chart" r:id="R0e41b463bb9047e5"/>
           </a:graphicData>
         </a:graphic>
       </p:graphicFrame>
@@ -4216,7 +4216,7 @@
         </p:xfrm>
         <a:graphic xmlns:a="http://schemas.openxmlformats.org/drawingml/2006/main">
           <a:graphicData uri="http://schemas.openxmlformats.org/drawingml/2006/chart">
-            <c:chart xmlns:r="http://schemas.openxmlformats.org/officeDocument/2006/relationships" xmlns:c="http://schemas.openxmlformats.org/drawingml/2006/chart" r:id="Rdaf1181cd1454c80"/>
+            <c:chart xmlns:r="http://schemas.openxmlformats.org/officeDocument/2006/relationships" xmlns:c="http://schemas.openxmlformats.org/drawingml/2006/chart" r:id="R2e16928ab8b648d8"/>
           </a:graphicData>
         </a:graphic>
       </p:graphicFrame>

--- a/skills/presentation-template-library/skills/artifact-template-gilt-market-ledger/assets/reference.pptx
+++ b/skills/presentation-template-library/skills/artifact-template-gilt-market-ledger/assets/reference.pptx
@@ -4198,7 +4198,7 @@
         </p:xfrm>
         <a:graphic xmlns:a="http://schemas.openxmlformats.org/drawingml/2006/main">
           <a:graphicData uri="http://schemas.openxmlformats.org/drawingml/2006/chart">
-            <c:chart xmlns:r="http://schemas.openxmlformats.org/officeDocument/2006/relationships" xmlns:c="http://schemas.openxmlformats.org/drawingml/2006/chart" r:id="R0e41b463bb9047e5"/>
+            <c:chart xmlns:r="http://schemas.openxmlformats.org/officeDocument/2006/relationships" xmlns:c="http://schemas.openxmlformats.org/drawingml/2006/chart" r:id="R217b57e61d4242e9"/>
           </a:graphicData>
         </a:graphic>
       </p:graphicFrame>
@@ -4216,7 +4216,7 @@
         </p:xfrm>
         <a:graphic xmlns:a="http://schemas.openxmlformats.org/drawingml/2006/main">
           <a:graphicData uri="http://schemas.openxmlformats.org/drawingml/2006/chart">
-            <c:chart xmlns:r="http://schemas.openxmlformats.org/officeDocument/2006/relationships" xmlns:c="http://schemas.openxmlformats.org/drawingml/2006/chart" r:id="R2e16928ab8b648d8"/>
+            <c:chart xmlns:r="http://schemas.openxmlformats.org/officeDocument/2006/relationships" xmlns:c="http://schemas.openxmlformats.org/drawingml/2006/chart" r:id="Rc0bbce6793504feb"/>
           </a:graphicData>
         </a:graphic>
       </p:graphicFrame>

--- a/skills/presentation-template-library/skills/artifact-template-gilt-market-ledger/assets/reference.pptx
+++ b/skills/presentation-template-library/skills/artifact-template-gilt-market-ledger/assets/reference.pptx
@@ -4198,7 +4198,7 @@
         </p:xfrm>
         <a:graphic xmlns:a="http://schemas.openxmlformats.org/drawingml/2006/main">
           <a:graphicData uri="http://schemas.openxmlformats.org/drawingml/2006/chart">
-            <c:chart xmlns:r="http://schemas.openxmlformats.org/officeDocument/2006/relationships" xmlns:c="http://schemas.openxmlformats.org/drawingml/2006/chart" r:id="R217b57e61d4242e9"/>
+            <c:chart xmlns:r="http://schemas.openxmlformats.org/officeDocument/2006/relationships" xmlns:c="http://schemas.openxmlformats.org/drawingml/2006/chart" r:id="Red0c8abc703040ab"/>
           </a:graphicData>
         </a:graphic>
       </p:graphicFrame>
@@ -4216,7 +4216,7 @@
         </p:xfrm>
         <a:graphic xmlns:a="http://schemas.openxmlformats.org/drawingml/2006/main">
           <a:graphicData uri="http://schemas.openxmlformats.org/drawingml/2006/chart">
-            <c:chart xmlns:r="http://schemas.openxmlformats.org/officeDocument/2006/relationships" xmlns:c="http://schemas.openxmlformats.org/drawingml/2006/chart" r:id="Rc0bbce6793504feb"/>
+            <c:chart xmlns:r="http://schemas.openxmlformats.org/officeDocument/2006/relationships" xmlns:c="http://schemas.openxmlformats.org/drawingml/2006/chart" r:id="R2c9b3ab998c442fa"/>
           </a:graphicData>
         </a:graphic>
       </p:graphicFrame>
